--- a/clase_04_datos_sensores/slides/slides_clase04.pptx
+++ b/clase_04_datos_sensores/slides/slides_clase04.pptx
@@ -3156,14 +3156,14 @@
         </p:nvSpPr>
         <p:spPr>
           <a:xfrm>
-            <a:off x="0" y="5760720"/>
-            <a:ext cx="12188952" cy="1097280"/>
+            <a:off x="8074152" y="0"/>
+            <a:ext cx="4114800" cy="6858000"/>
           </a:xfrm>
           <a:prstGeom prst="rect">
             <a:avLst/>
           </a:prstGeom>
           <a:solidFill>
-            <a:srgbClr val="0099CC"/>
+            <a:srgbClr val="0E5568"/>
           </a:solidFill>
           <a:ln>
             <a:noFill/>
@@ -3200,7 +3200,7 @@
         <p:spPr>
           <a:xfrm>
             <a:off x="0" y="0"/>
-            <a:ext cx="12188952" cy="109728"/>
+            <a:ext cx="12188952" cy="91440"/>
           </a:xfrm>
           <a:prstGeom prst="rect">
             <a:avLst/>
@@ -3234,9 +3234,138 @@
           </a:p>
         </p:txBody>
       </p:sp>
+      <p:sp>
+        <p:nvSpPr>
+          <p:cNvPr id="5" name="Rectangle 4"/>
+          <p:cNvSpPr/>
+          <p:nvPr/>
+        </p:nvSpPr>
+        <p:spPr>
+          <a:xfrm>
+            <a:off x="0" y="6766560"/>
+            <a:ext cx="12188952" cy="91440"/>
+          </a:xfrm>
+          <a:prstGeom prst="rect">
+            <a:avLst/>
+          </a:prstGeom>
+          <a:solidFill>
+            <a:srgbClr val="D4A017"/>
+          </a:solidFill>
+          <a:ln>
+            <a:noFill/>
+          </a:ln>
+        </p:spPr>
+        <p:style>
+          <a:lnRef idx="1">
+            <a:schemeClr val="accent1"/>
+          </a:lnRef>
+          <a:fillRef idx="3">
+            <a:schemeClr val="accent1"/>
+          </a:fillRef>
+          <a:effectRef idx="2">
+            <a:schemeClr val="accent1"/>
+          </a:effectRef>
+          <a:fontRef idx="minor">
+            <a:schemeClr val="lt1"/>
+          </a:fontRef>
+        </p:style>
+        <p:txBody>
+          <a:bodyPr rtlCol="0" anchor="ctr"/>
+          <a:lstStyle/>
+          <a:p>
+            <a:pPr algn="ctr"/>
+          </a:p>
+        </p:txBody>
+      </p:sp>
+      <p:sp>
+        <p:nvSpPr>
+          <p:cNvPr id="6" name="Rectangle 5"/>
+          <p:cNvSpPr/>
+          <p:nvPr/>
+        </p:nvSpPr>
+        <p:spPr>
+          <a:xfrm>
+            <a:off x="0" y="5806440"/>
+            <a:ext cx="12188952" cy="960120"/>
+          </a:xfrm>
+          <a:prstGeom prst="rect">
+            <a:avLst/>
+          </a:prstGeom>
+          <a:solidFill>
+            <a:srgbClr val="000000"/>
+          </a:solidFill>
+          <a:ln>
+            <a:noFill/>
+          </a:ln>
+        </p:spPr>
+        <p:style>
+          <a:lnRef idx="1">
+            <a:schemeClr val="accent1"/>
+          </a:lnRef>
+          <a:fillRef idx="3">
+            <a:schemeClr val="accent1"/>
+          </a:fillRef>
+          <a:effectRef idx="2">
+            <a:schemeClr val="accent1"/>
+          </a:effectRef>
+          <a:fontRef idx="minor">
+            <a:schemeClr val="lt1"/>
+          </a:fontRef>
+        </p:style>
+        <p:txBody>
+          <a:bodyPr rtlCol="0" anchor="ctr"/>
+          <a:lstStyle/>
+          <a:p>
+            <a:pPr algn="ctr"/>
+          </a:p>
+        </p:txBody>
+      </p:sp>
+      <p:sp>
+        <p:nvSpPr>
+          <p:cNvPr id="7" name="Rectangle 6"/>
+          <p:cNvSpPr/>
+          <p:nvPr/>
+        </p:nvSpPr>
+        <p:spPr>
+          <a:xfrm>
+            <a:off x="0" y="5806440"/>
+            <a:ext cx="12188952" cy="960120"/>
+          </a:xfrm>
+          <a:prstGeom prst="rect">
+            <a:avLst/>
+          </a:prstGeom>
+          <a:solidFill>
+            <a:srgbClr val="1D73A4"/>
+          </a:solidFill>
+          <a:ln>
+            <a:noFill/>
+          </a:ln>
+        </p:spPr>
+        <p:style>
+          <a:lnRef idx="1">
+            <a:schemeClr val="accent1"/>
+          </a:lnRef>
+          <a:fillRef idx="3">
+            <a:schemeClr val="accent1"/>
+          </a:fillRef>
+          <a:effectRef idx="2">
+            <a:schemeClr val="accent1"/>
+          </a:effectRef>
+          <a:fontRef idx="minor">
+            <a:schemeClr val="lt1"/>
+          </a:fontRef>
+        </p:style>
+        <p:txBody>
+          <a:bodyPr rtlCol="0" anchor="ctr"/>
+          <a:lstStyle/>
+          <a:p>
+            <a:pPr algn="ctr"/>
+          </a:p>
+        </p:txBody>
+      </p:sp>
       <p:pic>
         <p:nvPicPr>
-          <p:cNvPr id="5" name="Picture 4" descr="logo_utn_frch_negro.png"/>
+          <p:cNvPr id="8" name="Picture 7" descr="logo_utn_frch_negro.png"/>
           <p:cNvPicPr>
             <a:picLocks noChangeAspect="1"/>
           </p:cNvPicPr>
@@ -3250,102 +3379,72 @@
         </p:blipFill>
         <p:spPr>
           <a:xfrm>
-            <a:off x="411480" y="164592"/>
-            <a:ext cx="1452286" cy="777240"/>
+            <a:off x="365760" y="155448"/>
+            <a:ext cx="1366857" cy="731520"/>
           </a:xfrm>
           <a:prstGeom prst="rect">
             <a:avLst/>
           </a:prstGeom>
         </p:spPr>
       </p:pic>
-      <p:sp>
-        <p:nvSpPr>
-          <p:cNvPr id="6" name="Rectangle 5"/>
+      <p:pic>
+        <p:nvPicPr>
+          <p:cNvPr id="9" name="Picture 8" descr="logo_pesqueros_full.png"/>
+          <p:cNvPicPr>
+            <a:picLocks noChangeAspect="1"/>
+          </p:cNvPicPr>
+          <p:nvPr/>
+        </p:nvPicPr>
+        <p:blipFill>
+          <a:blip r:embed="rId3"/>
+          <a:stretch>
+            <a:fillRect/>
+          </a:stretch>
+        </p:blipFill>
+        <p:spPr>
+          <a:xfrm>
+            <a:off x="8897112" y="228600"/>
+            <a:ext cx="1981200" cy="594360"/>
+          </a:xfrm>
+          <a:prstGeom prst="rect">
+            <a:avLst/>
+          </a:prstGeom>
+        </p:spPr>
+      </p:pic>
+      <p:pic>
+        <p:nvPicPr>
+          <p:cNvPr id="10" name="Picture 9" descr="logo_ariel_symbol.png"/>
+          <p:cNvPicPr>
+            <a:picLocks noChangeAspect="1"/>
+          </p:cNvPicPr>
+          <p:nvPr/>
+        </p:nvPicPr>
+        <p:blipFill>
+          <a:blip r:embed="rId4"/>
+          <a:stretch>
+            <a:fillRect/>
+          </a:stretch>
+        </p:blipFill>
+        <p:spPr>
+          <a:xfrm>
+            <a:off x="11091672" y="228600"/>
+            <a:ext cx="1981200" cy="594360"/>
+          </a:xfrm>
+          <a:prstGeom prst="rect">
+            <a:avLst/>
+          </a:prstGeom>
+        </p:spPr>
+      </p:pic>
+      <p:sp>
+        <p:nvSpPr>
+          <p:cNvPr id="11" name="Rectangle 10"/>
           <p:cNvSpPr/>
           <p:nvPr/>
         </p:nvSpPr>
         <p:spPr>
           <a:xfrm>
-            <a:off x="10268712" y="164592"/>
-            <a:ext cx="1691640" cy="777240"/>
-          </a:xfrm>
-          <a:prstGeom prst="rect">
-            <a:avLst/>
-          </a:prstGeom>
-          <a:solidFill>
-            <a:srgbClr val="059669"/>
-          </a:solidFill>
-          <a:ln>
-            <a:noFill/>
-          </a:ln>
-        </p:spPr>
-        <p:style>
-          <a:lnRef idx="1">
-            <a:schemeClr val="accent1"/>
-          </a:lnRef>
-          <a:fillRef idx="3">
-            <a:schemeClr val="accent1"/>
-          </a:fillRef>
-          <a:effectRef idx="2">
-            <a:schemeClr val="accent1"/>
-          </a:effectRef>
-          <a:fontRef idx="minor">
-            <a:schemeClr val="lt1"/>
-          </a:fontRef>
-        </p:style>
-        <p:txBody>
-          <a:bodyPr rtlCol="0" anchor="ctr"/>
-          <a:lstStyle/>
-          <a:p>
-            <a:pPr algn="ctr"/>
-          </a:p>
-        </p:txBody>
-      </p:sp>
-      <p:sp>
-        <p:nvSpPr>
-          <p:cNvPr id="7" name="TextBox 6"/>
-          <p:cNvSpPr txBox="1"/>
-          <p:nvPr/>
-        </p:nvSpPr>
-        <p:spPr>
-          <a:xfrm>
-            <a:off x="10268712" y="164592"/>
-            <a:ext cx="1691640" cy="777240"/>
-          </a:xfrm>
-          <a:prstGeom prst="rect">
-            <a:avLst/>
-          </a:prstGeom>
-          <a:noFill/>
-        </p:spPr>
-        <p:txBody>
-          <a:bodyPr wrap="none">
-            <a:spAutoFit/>
-          </a:bodyPr>
-          <a:lstStyle/>
-          <a:p>
-            <a:pPr algn="ctr"/>
-            <a:r>
-              <a:rPr sz="900" b="1">
-                <a:solidFill>
-                  <a:srgbClr val="FFFFFF"/>
-                </a:solidFill>
-                <a:latin typeface="Calibri"/>
-              </a:rPr>
-              <a:t>PesquerosEnIA</a:t>
-            </a:r>
-          </a:p>
-        </p:txBody>
-      </p:sp>
-      <p:sp>
-        <p:nvSpPr>
-          <p:cNvPr id="8" name="Rectangle 7"/>
-          <p:cNvSpPr/>
-          <p:nvPr/>
-        </p:nvSpPr>
-        <p:spPr>
-          <a:xfrm>
-            <a:off x="411480" y="1234440"/>
-            <a:ext cx="11365992" cy="36576"/>
+            <a:off x="365760" y="1078992"/>
+            <a:ext cx="11457432" cy="32004"/>
           </a:xfrm>
           <a:prstGeom prst="rect">
             <a:avLst/>
@@ -3381,14 +3480,14 @@
       </p:sp>
       <p:sp>
         <p:nvSpPr>
-          <p:cNvPr id="9" name="TextBox 8"/>
+          <p:cNvPr id="12" name="TextBox 11"/>
           <p:cNvSpPr txBox="1"/>
           <p:nvPr/>
         </p:nvSpPr>
         <p:spPr>
           <a:xfrm>
-            <a:off x="411480" y="1417320"/>
-            <a:ext cx="4572000" cy="457200"/>
+            <a:off x="411480" y="1234440"/>
+            <a:ext cx="3657600" cy="384048"/>
           </a:xfrm>
           <a:prstGeom prst="rect">
             <a:avLst/>
@@ -3403,7 +3502,7 @@
           <a:p>
             <a:pPr algn="l"/>
             <a:r>
-              <a:rPr sz="1300" b="1" i="0">
+              <a:rPr sz="1200" b="1" i="0">
                 <a:solidFill>
                   <a:srgbClr val="0099CC"/>
                 </a:solidFill>
@@ -3416,14 +3515,14 @@
       </p:sp>
       <p:sp>
         <p:nvSpPr>
-          <p:cNvPr id="10" name="TextBox 9"/>
+          <p:cNvPr id="13" name="TextBox 12"/>
           <p:cNvSpPr txBox="1"/>
           <p:nvPr/>
         </p:nvSpPr>
         <p:spPr>
           <a:xfrm>
-            <a:off x="411480" y="1828800"/>
-            <a:ext cx="11365992" cy="2011680"/>
+            <a:off x="411480" y="1600200"/>
+            <a:ext cx="7434072" cy="2286000"/>
           </a:xfrm>
           <a:prstGeom prst="rect">
             <a:avLst/>
@@ -3438,7 +3537,7 @@
           <a:p>
             <a:pPr algn="l"/>
             <a:r>
-              <a:rPr sz="3600" b="1" i="0">
+              <a:rPr sz="3400" b="1" i="0">
                 <a:solidFill>
                   <a:srgbClr val="FFFFFF"/>
                 </a:solidFill>
@@ -3451,14 +3550,14 @@
       </p:sp>
       <p:sp>
         <p:nvSpPr>
-          <p:cNvPr id="11" name="TextBox 10"/>
+          <p:cNvPr id="14" name="TextBox 13"/>
           <p:cNvSpPr txBox="1"/>
           <p:nvPr/>
         </p:nvSpPr>
         <p:spPr>
           <a:xfrm>
-            <a:off x="411480" y="3749039"/>
-            <a:ext cx="11365992" cy="731520"/>
+            <a:off x="411480" y="3794760"/>
+            <a:ext cx="7434072" cy="685800"/>
           </a:xfrm>
           <a:prstGeom prst="rect">
             <a:avLst/>
@@ -3473,7 +3572,7 @@
           <a:p>
             <a:pPr algn="l"/>
             <a:r>
-              <a:rPr sz="1900" b="0" i="0">
+              <a:rPr sz="1700" b="0" i="0">
                 <a:solidFill>
                   <a:srgbClr val="0099CC"/>
                 </a:solidFill>
@@ -3486,14 +3585,14 @@
       </p:sp>
       <p:sp>
         <p:nvSpPr>
-          <p:cNvPr id="12" name="TextBox 11"/>
+          <p:cNvPr id="15" name="TextBox 14"/>
           <p:cNvSpPr txBox="1"/>
           <p:nvPr/>
         </p:nvSpPr>
         <p:spPr>
           <a:xfrm>
-            <a:off x="411480" y="5852160"/>
-            <a:ext cx="7315200" cy="457200"/>
+            <a:off x="8348472" y="2286000"/>
+            <a:ext cx="3474720" cy="914400"/>
           </a:xfrm>
           <a:prstGeom prst="rect">
             <a:avLst/>
@@ -3506,29 +3605,29 @@
           </a:bodyPr>
           <a:lstStyle/>
           <a:p>
-            <a:pPr algn="l"/>
-            <a:r>
-              <a:rPr sz="1400" b="0" i="0">
-                <a:solidFill>
-                  <a:srgbClr val="FFFFFF"/>
-                </a:solidFill>
-                <a:latin typeface="Calibri"/>
-              </a:rPr>
-              <a:t>Docentes: Ariel Giamportone · Soraya Corvalán</a:t>
-            </a:r>
-          </a:p>
-        </p:txBody>
-      </p:sp>
-      <p:sp>
-        <p:nvSpPr>
-          <p:cNvPr id="13" name="TextBox 12"/>
+            <a:pPr algn="ctr"/>
+            <a:r>
+              <a:rPr sz="2200" b="0" i="1">
+                <a:solidFill>
+                  <a:srgbClr val="B4D2F0"/>
+                </a:solidFill>
+                <a:latin typeface="Calibri"/>
+              </a:rPr>
+              <a:t>IA · Pesca · Datos</a:t>
+            </a:r>
+          </a:p>
+        </p:txBody>
+      </p:sp>
+      <p:sp>
+        <p:nvSpPr>
+          <p:cNvPr id="16" name="TextBox 15"/>
           <p:cNvSpPr txBox="1"/>
           <p:nvPr/>
         </p:nvSpPr>
         <p:spPr>
           <a:xfrm>
-            <a:off x="411480" y="6263640"/>
-            <a:ext cx="11365992" cy="457200"/>
+            <a:off x="8348472" y="3108960"/>
+            <a:ext cx="3474720" cy="548640"/>
           </a:xfrm>
           <a:prstGeom prst="rect">
             <a:avLst/>
@@ -3541,15 +3640,85 @@
           </a:bodyPr>
           <a:lstStyle/>
           <a:p>
+            <a:pPr algn="ctr"/>
+            <a:r>
+              <a:rPr sz="1300" b="0" i="0">
+                <a:solidFill>
+                  <a:srgbClr val="96BEE6"/>
+                </a:solidFill>
+                <a:latin typeface="Calibri"/>
+              </a:rPr>
+              <a:t>UTN FRCh + PesquerosEnIA</a:t>
+            </a:r>
+          </a:p>
+        </p:txBody>
+      </p:sp>
+      <p:sp>
+        <p:nvSpPr>
+          <p:cNvPr id="17" name="TextBox 16"/>
+          <p:cNvSpPr txBox="1"/>
+          <p:nvPr/>
+        </p:nvSpPr>
+        <p:spPr>
+          <a:xfrm>
+            <a:off x="411480" y="5897880"/>
+            <a:ext cx="8229600" cy="438912"/>
+          </a:xfrm>
+          <a:prstGeom prst="rect">
+            <a:avLst/>
+          </a:prstGeom>
+          <a:noFill/>
+        </p:spPr>
+        <p:txBody>
+          <a:bodyPr wrap="square">
+            <a:spAutoFit/>
+          </a:bodyPr>
+          <a:lstStyle/>
+          <a:p>
             <a:pPr algn="l"/>
             <a:r>
-              <a:rPr sz="1100" b="0" i="0">
-                <a:solidFill>
-                  <a:srgbClr val="C8E6FF"/>
-                </a:solidFill>
-                <a:latin typeface="Calibri"/>
-              </a:rPr>
-              <a:t>Inteligencia Artificial Aplicada a la Producción Pesquera · UTN FRCh · 2026</a:t>
+              <a:rPr sz="1400" b="1" i="0">
+                <a:solidFill>
+                  <a:srgbClr val="FFFFFF"/>
+                </a:solidFill>
+                <a:latin typeface="Calibri"/>
+              </a:rPr>
+              <a:t>Docentes: Ariel Giamportone · Soraya Corvalán</a:t>
+            </a:r>
+          </a:p>
+        </p:txBody>
+      </p:sp>
+      <p:sp>
+        <p:nvSpPr>
+          <p:cNvPr id="18" name="TextBox 17"/>
+          <p:cNvSpPr txBox="1"/>
+          <p:nvPr/>
+        </p:nvSpPr>
+        <p:spPr>
+          <a:xfrm>
+            <a:off x="411480" y="6309360"/>
+            <a:ext cx="11365992" cy="411480"/>
+          </a:xfrm>
+          <a:prstGeom prst="rect">
+            <a:avLst/>
+          </a:prstGeom>
+          <a:noFill/>
+        </p:spPr>
+        <p:txBody>
+          <a:bodyPr wrap="square">
+            <a:spAutoFit/>
+          </a:bodyPr>
+          <a:lstStyle/>
+          <a:p>
+            <a:pPr algn="l"/>
+            <a:r>
+              <a:rPr sz="1000" b="0" i="0">
+                <a:solidFill>
+                  <a:srgbClr val="BEDCFA"/>
+                </a:solidFill>
+                <a:latin typeface="Calibri"/>
+              </a:rPr>
+              <a:t>Inteligencia Artificial Aplicada a la Produccion Pesquera  |  UTN FRCh  |  2026</a:t>
             </a:r>
           </a:p>
         </p:txBody>
@@ -3973,8 +4142,8 @@
         </p:nvSpPr>
         <p:spPr>
           <a:xfrm>
-            <a:off x="0" y="6446520"/>
-            <a:ext cx="12188952" cy="411480"/>
+            <a:off x="0" y="6419088"/>
+            <a:ext cx="12188952" cy="438912"/>
           </a:xfrm>
           <a:prstGeom prst="rect">
             <a:avLst/>
@@ -4008,16 +4177,40 @@
           </a:p>
         </p:txBody>
       </p:sp>
-      <p:sp>
-        <p:nvSpPr>
-          <p:cNvPr id="9" name="TextBox 8"/>
+      <p:pic>
+        <p:nvPicPr>
+          <p:cNvPr id="9" name="Picture 8" descr="logo_pesqueros_symbol.png"/>
+          <p:cNvPicPr>
+            <a:picLocks noChangeAspect="1"/>
+          </p:cNvPicPr>
+          <p:nvPr/>
+        </p:nvPicPr>
+        <p:blipFill>
+          <a:blip r:embed="rId2"/>
+          <a:stretch>
+            <a:fillRect/>
+          </a:stretch>
+        </p:blipFill>
+        <p:spPr>
+          <a:xfrm>
+            <a:off x="137160" y="6455664"/>
+            <a:ext cx="347472" cy="347472"/>
+          </a:xfrm>
+          <a:prstGeom prst="rect">
+            <a:avLst/>
+          </a:prstGeom>
+        </p:spPr>
+      </p:pic>
+      <p:sp>
+        <p:nvSpPr>
+          <p:cNvPr id="10" name="TextBox 9"/>
           <p:cNvSpPr txBox="1"/>
           <p:nvPr/>
         </p:nvSpPr>
         <p:spPr>
           <a:xfrm>
-            <a:off x="274320" y="6473952"/>
-            <a:ext cx="11640312" cy="347472"/>
+            <a:off x="594360" y="6455664"/>
+            <a:ext cx="11457432" cy="347472"/>
           </a:xfrm>
           <a:prstGeom prst="rect">
             <a:avLst/>
@@ -4038,7 +4231,7 @@
                 </a:solidFill>
                 <a:latin typeface="Calibri"/>
               </a:rPr>
-              <a:t>Inteligencia Artificial Aplicada a la Producción Pesquera  ·  UTN FRCh  ·  PesquerosEnIA  ·  2026</a:t>
+              <a:t>IA Aplicada a la Produccion Pesquera  |  UTN FRCh  |  PesquerosEnIA  |  2026</a:t>
             </a:r>
           </a:p>
         </p:txBody>
@@ -5347,8 +5540,8 @@
         </p:nvSpPr>
         <p:spPr>
           <a:xfrm>
-            <a:off x="0" y="6446520"/>
-            <a:ext cx="12188952" cy="411480"/>
+            <a:off x="0" y="6419088"/>
+            <a:ext cx="12188952" cy="438912"/>
           </a:xfrm>
           <a:prstGeom prst="rect">
             <a:avLst/>
@@ -5382,16 +5575,40 @@
           </a:p>
         </p:txBody>
       </p:sp>
-      <p:sp>
-        <p:nvSpPr>
-          <p:cNvPr id="37" name="TextBox 36"/>
+      <p:pic>
+        <p:nvPicPr>
+          <p:cNvPr id="37" name="Picture 36" descr="logo_pesqueros_symbol.png"/>
+          <p:cNvPicPr>
+            <a:picLocks noChangeAspect="1"/>
+          </p:cNvPicPr>
+          <p:nvPr/>
+        </p:nvPicPr>
+        <p:blipFill>
+          <a:blip r:embed="rId2"/>
+          <a:stretch>
+            <a:fillRect/>
+          </a:stretch>
+        </p:blipFill>
+        <p:spPr>
+          <a:xfrm>
+            <a:off x="137160" y="6455664"/>
+            <a:ext cx="347472" cy="347472"/>
+          </a:xfrm>
+          <a:prstGeom prst="rect">
+            <a:avLst/>
+          </a:prstGeom>
+        </p:spPr>
+      </p:pic>
+      <p:sp>
+        <p:nvSpPr>
+          <p:cNvPr id="38" name="TextBox 37"/>
           <p:cNvSpPr txBox="1"/>
           <p:nvPr/>
         </p:nvSpPr>
         <p:spPr>
           <a:xfrm>
-            <a:off x="274320" y="6473952"/>
-            <a:ext cx="11640312" cy="347472"/>
+            <a:off x="594360" y="6455664"/>
+            <a:ext cx="11457432" cy="347472"/>
           </a:xfrm>
           <a:prstGeom prst="rect">
             <a:avLst/>
@@ -5412,7 +5629,7 @@
                 </a:solidFill>
                 <a:latin typeface="Calibri"/>
               </a:rPr>
-              <a:t>Inteligencia Artificial Aplicada a la Producción Pesquera  ·  UTN FRCh  ·  PesquerosEnIA  ·  2026</a:t>
+              <a:t>IA Aplicada a la Produccion Pesquera  |  UTN FRCh  |  PesquerosEnIA  |  2026</a:t>
             </a:r>
           </a:p>
         </p:txBody>
@@ -6573,8 +6790,8 @@
         </p:nvSpPr>
         <p:spPr>
           <a:xfrm>
-            <a:off x="0" y="6446520"/>
-            <a:ext cx="12188952" cy="411480"/>
+            <a:off x="0" y="6419088"/>
+            <a:ext cx="12188952" cy="438912"/>
           </a:xfrm>
           <a:prstGeom prst="rect">
             <a:avLst/>
@@ -6608,16 +6825,40 @@
           </a:p>
         </p:txBody>
       </p:sp>
-      <p:sp>
-        <p:nvSpPr>
-          <p:cNvPr id="33" name="TextBox 32"/>
+      <p:pic>
+        <p:nvPicPr>
+          <p:cNvPr id="33" name="Picture 32" descr="logo_pesqueros_symbol.png"/>
+          <p:cNvPicPr>
+            <a:picLocks noChangeAspect="1"/>
+          </p:cNvPicPr>
+          <p:nvPr/>
+        </p:nvPicPr>
+        <p:blipFill>
+          <a:blip r:embed="rId2"/>
+          <a:stretch>
+            <a:fillRect/>
+          </a:stretch>
+        </p:blipFill>
+        <p:spPr>
+          <a:xfrm>
+            <a:off x="137160" y="6455664"/>
+            <a:ext cx="347472" cy="347472"/>
+          </a:xfrm>
+          <a:prstGeom prst="rect">
+            <a:avLst/>
+          </a:prstGeom>
+        </p:spPr>
+      </p:pic>
+      <p:sp>
+        <p:nvSpPr>
+          <p:cNvPr id="34" name="TextBox 33"/>
           <p:cNvSpPr txBox="1"/>
           <p:nvPr/>
         </p:nvSpPr>
         <p:spPr>
           <a:xfrm>
-            <a:off x="274320" y="6473952"/>
-            <a:ext cx="11640312" cy="347472"/>
+            <a:off x="594360" y="6455664"/>
+            <a:ext cx="11457432" cy="347472"/>
           </a:xfrm>
           <a:prstGeom prst="rect">
             <a:avLst/>
@@ -6638,7 +6879,7 @@
                 </a:solidFill>
                 <a:latin typeface="Calibri"/>
               </a:rPr>
-              <a:t>Inteligencia Artificial Aplicada a la Producción Pesquera  ·  UTN FRCh  ·  PesquerosEnIA  ·  2026</a:t>
+              <a:t>IA Aplicada a la Produccion Pesquera  |  UTN FRCh  |  PesquerosEnIA  |  2026</a:t>
             </a:r>
           </a:p>
         </p:txBody>
@@ -7081,8 +7322,8 @@
         </p:nvSpPr>
         <p:spPr>
           <a:xfrm>
-            <a:off x="0" y="6446520"/>
-            <a:ext cx="12188952" cy="411480"/>
+            <a:off x="0" y="6419088"/>
+            <a:ext cx="12188952" cy="438912"/>
           </a:xfrm>
           <a:prstGeom prst="rect">
             <a:avLst/>
@@ -7116,16 +7357,40 @@
           </a:p>
         </p:txBody>
       </p:sp>
-      <p:sp>
-        <p:nvSpPr>
-          <p:cNvPr id="9" name="TextBox 8"/>
+      <p:pic>
+        <p:nvPicPr>
+          <p:cNvPr id="9" name="Picture 8" descr="logo_pesqueros_symbol.png"/>
+          <p:cNvPicPr>
+            <a:picLocks noChangeAspect="1"/>
+          </p:cNvPicPr>
+          <p:nvPr/>
+        </p:nvPicPr>
+        <p:blipFill>
+          <a:blip r:embed="rId2"/>
+          <a:stretch>
+            <a:fillRect/>
+          </a:stretch>
+        </p:blipFill>
+        <p:spPr>
+          <a:xfrm>
+            <a:off x="137160" y="6455664"/>
+            <a:ext cx="347472" cy="347472"/>
+          </a:xfrm>
+          <a:prstGeom prst="rect">
+            <a:avLst/>
+          </a:prstGeom>
+        </p:spPr>
+      </p:pic>
+      <p:sp>
+        <p:nvSpPr>
+          <p:cNvPr id="10" name="TextBox 9"/>
           <p:cNvSpPr txBox="1"/>
           <p:nvPr/>
         </p:nvSpPr>
         <p:spPr>
           <a:xfrm>
-            <a:off x="274320" y="6473952"/>
-            <a:ext cx="11640312" cy="347472"/>
+            <a:off x="594360" y="6455664"/>
+            <a:ext cx="11457432" cy="347472"/>
           </a:xfrm>
           <a:prstGeom prst="rect">
             <a:avLst/>
@@ -7146,7 +7411,7 @@
                 </a:solidFill>
                 <a:latin typeface="Calibri"/>
               </a:rPr>
-              <a:t>Inteligencia Artificial Aplicada a la Producción Pesquera  ·  UTN FRCh  ·  PesquerosEnIA  ·  2026</a:t>
+              <a:t>IA Aplicada a la Produccion Pesquera  |  UTN FRCh  |  PesquerosEnIA  |  2026</a:t>
             </a:r>
           </a:p>
         </p:txBody>
@@ -7513,8 +7778,8 @@
         </p:nvSpPr>
         <p:spPr>
           <a:xfrm>
-            <a:off x="0" y="6446520"/>
-            <a:ext cx="12188952" cy="411480"/>
+            <a:off x="0" y="6419088"/>
+            <a:ext cx="12188952" cy="438912"/>
           </a:xfrm>
           <a:prstGeom prst="rect">
             <a:avLst/>
@@ -7548,16 +7813,40 @@
           </a:p>
         </p:txBody>
       </p:sp>
-      <p:sp>
-        <p:nvSpPr>
-          <p:cNvPr id="9" name="TextBox 8"/>
+      <p:pic>
+        <p:nvPicPr>
+          <p:cNvPr id="9" name="Picture 8" descr="logo_pesqueros_symbol.png"/>
+          <p:cNvPicPr>
+            <a:picLocks noChangeAspect="1"/>
+          </p:cNvPicPr>
+          <p:nvPr/>
+        </p:nvPicPr>
+        <p:blipFill>
+          <a:blip r:embed="rId2"/>
+          <a:stretch>
+            <a:fillRect/>
+          </a:stretch>
+        </p:blipFill>
+        <p:spPr>
+          <a:xfrm>
+            <a:off x="137160" y="6455664"/>
+            <a:ext cx="347472" cy="347472"/>
+          </a:xfrm>
+          <a:prstGeom prst="rect">
+            <a:avLst/>
+          </a:prstGeom>
+        </p:spPr>
+      </p:pic>
+      <p:sp>
+        <p:nvSpPr>
+          <p:cNvPr id="10" name="TextBox 9"/>
           <p:cNvSpPr txBox="1"/>
           <p:nvPr/>
         </p:nvSpPr>
         <p:spPr>
           <a:xfrm>
-            <a:off x="274320" y="6473952"/>
-            <a:ext cx="11640312" cy="347472"/>
+            <a:off x="594360" y="6455664"/>
+            <a:ext cx="11457432" cy="347472"/>
           </a:xfrm>
           <a:prstGeom prst="rect">
             <a:avLst/>
@@ -7578,7 +7867,7 @@
                 </a:solidFill>
                 <a:latin typeface="Calibri"/>
               </a:rPr>
-              <a:t>Inteligencia Artificial Aplicada a la Producción Pesquera  ·  UTN FRCh  ·  PesquerosEnIA  ·  2026</a:t>
+              <a:t>IA Aplicada a la Produccion Pesquera  |  UTN FRCh  |  PesquerosEnIA  |  2026</a:t>
             </a:r>
           </a:p>
         </p:txBody>
@@ -7983,8 +8272,8 @@
         </p:nvSpPr>
         <p:spPr>
           <a:xfrm>
-            <a:off x="0" y="6446520"/>
-            <a:ext cx="12188952" cy="411480"/>
+            <a:off x="0" y="6419088"/>
+            <a:ext cx="12188952" cy="438912"/>
           </a:xfrm>
           <a:prstGeom prst="rect">
             <a:avLst/>
@@ -8018,16 +8307,40 @@
           </a:p>
         </p:txBody>
       </p:sp>
-      <p:sp>
-        <p:nvSpPr>
-          <p:cNvPr id="9" name="TextBox 8"/>
+      <p:pic>
+        <p:nvPicPr>
+          <p:cNvPr id="9" name="Picture 8" descr="logo_pesqueros_symbol.png"/>
+          <p:cNvPicPr>
+            <a:picLocks noChangeAspect="1"/>
+          </p:cNvPicPr>
+          <p:nvPr/>
+        </p:nvPicPr>
+        <p:blipFill>
+          <a:blip r:embed="rId2"/>
+          <a:stretch>
+            <a:fillRect/>
+          </a:stretch>
+        </p:blipFill>
+        <p:spPr>
+          <a:xfrm>
+            <a:off x="137160" y="6455664"/>
+            <a:ext cx="347472" cy="347472"/>
+          </a:xfrm>
+          <a:prstGeom prst="rect">
+            <a:avLst/>
+          </a:prstGeom>
+        </p:spPr>
+      </p:pic>
+      <p:sp>
+        <p:nvSpPr>
+          <p:cNvPr id="10" name="TextBox 9"/>
           <p:cNvSpPr txBox="1"/>
           <p:nvPr/>
         </p:nvSpPr>
         <p:spPr>
           <a:xfrm>
-            <a:off x="274320" y="6473952"/>
-            <a:ext cx="11640312" cy="347472"/>
+            <a:off x="594360" y="6455664"/>
+            <a:ext cx="11457432" cy="347472"/>
           </a:xfrm>
           <a:prstGeom prst="rect">
             <a:avLst/>
@@ -8048,7 +8361,7 @@
                 </a:solidFill>
                 <a:latin typeface="Calibri"/>
               </a:rPr>
-              <a:t>Inteligencia Artificial Aplicada a la Producción Pesquera  ·  UTN FRCh  ·  PesquerosEnIA  ·  2026</a:t>
+              <a:t>IA Aplicada a la Produccion Pesquera  |  UTN FRCh  |  PesquerosEnIA  |  2026</a:t>
             </a:r>
           </a:p>
         </p:txBody>
@@ -8453,8 +8766,8 @@
         </p:nvSpPr>
         <p:spPr>
           <a:xfrm>
-            <a:off x="0" y="6446520"/>
-            <a:ext cx="12188952" cy="411480"/>
+            <a:off x="0" y="6419088"/>
+            <a:ext cx="12188952" cy="438912"/>
           </a:xfrm>
           <a:prstGeom prst="rect">
             <a:avLst/>
@@ -8488,16 +8801,40 @@
           </a:p>
         </p:txBody>
       </p:sp>
-      <p:sp>
-        <p:nvSpPr>
-          <p:cNvPr id="9" name="TextBox 8"/>
+      <p:pic>
+        <p:nvPicPr>
+          <p:cNvPr id="9" name="Picture 8" descr="logo_pesqueros_symbol.png"/>
+          <p:cNvPicPr>
+            <a:picLocks noChangeAspect="1"/>
+          </p:cNvPicPr>
+          <p:nvPr/>
+        </p:nvPicPr>
+        <p:blipFill>
+          <a:blip r:embed="rId2"/>
+          <a:stretch>
+            <a:fillRect/>
+          </a:stretch>
+        </p:blipFill>
+        <p:spPr>
+          <a:xfrm>
+            <a:off x="137160" y="6455664"/>
+            <a:ext cx="347472" cy="347472"/>
+          </a:xfrm>
+          <a:prstGeom prst="rect">
+            <a:avLst/>
+          </a:prstGeom>
+        </p:spPr>
+      </p:pic>
+      <p:sp>
+        <p:nvSpPr>
+          <p:cNvPr id="10" name="TextBox 9"/>
           <p:cNvSpPr txBox="1"/>
           <p:nvPr/>
         </p:nvSpPr>
         <p:spPr>
           <a:xfrm>
-            <a:off x="274320" y="6473952"/>
-            <a:ext cx="11640312" cy="347472"/>
+            <a:off x="594360" y="6455664"/>
+            <a:ext cx="11457432" cy="347472"/>
           </a:xfrm>
           <a:prstGeom prst="rect">
             <a:avLst/>
@@ -8518,7 +8855,7 @@
                 </a:solidFill>
                 <a:latin typeface="Calibri"/>
               </a:rPr>
-              <a:t>Inteligencia Artificial Aplicada a la Producción Pesquera  ·  UTN FRCh  ·  PesquerosEnIA  ·  2026</a:t>
+              <a:t>IA Aplicada a la Produccion Pesquera  |  UTN FRCh  |  PesquerosEnIA  |  2026</a:t>
             </a:r>
           </a:p>
         </p:txBody>
@@ -8942,8 +9279,8 @@
         </p:nvSpPr>
         <p:spPr>
           <a:xfrm>
-            <a:off x="0" y="6446520"/>
-            <a:ext cx="12188952" cy="411480"/>
+            <a:off x="0" y="6419088"/>
+            <a:ext cx="12188952" cy="438912"/>
           </a:xfrm>
           <a:prstGeom prst="rect">
             <a:avLst/>
@@ -8977,16 +9314,40 @@
           </a:p>
         </p:txBody>
       </p:sp>
-      <p:sp>
-        <p:nvSpPr>
-          <p:cNvPr id="9" name="TextBox 8"/>
+      <p:pic>
+        <p:nvPicPr>
+          <p:cNvPr id="9" name="Picture 8" descr="logo_pesqueros_symbol.png"/>
+          <p:cNvPicPr>
+            <a:picLocks noChangeAspect="1"/>
+          </p:cNvPicPr>
+          <p:nvPr/>
+        </p:nvPicPr>
+        <p:blipFill>
+          <a:blip r:embed="rId2"/>
+          <a:stretch>
+            <a:fillRect/>
+          </a:stretch>
+        </p:blipFill>
+        <p:spPr>
+          <a:xfrm>
+            <a:off x="137160" y="6455664"/>
+            <a:ext cx="347472" cy="347472"/>
+          </a:xfrm>
+          <a:prstGeom prst="rect">
+            <a:avLst/>
+          </a:prstGeom>
+        </p:spPr>
+      </p:pic>
+      <p:sp>
+        <p:nvSpPr>
+          <p:cNvPr id="10" name="TextBox 9"/>
           <p:cNvSpPr txBox="1"/>
           <p:nvPr/>
         </p:nvSpPr>
         <p:spPr>
           <a:xfrm>
-            <a:off x="274320" y="6473952"/>
-            <a:ext cx="11640312" cy="347472"/>
+            <a:off x="594360" y="6455664"/>
+            <a:ext cx="11457432" cy="347472"/>
           </a:xfrm>
           <a:prstGeom prst="rect">
             <a:avLst/>
@@ -9007,7 +9368,7 @@
                 </a:solidFill>
                 <a:latin typeface="Calibri"/>
               </a:rPr>
-              <a:t>Inteligencia Artificial Aplicada a la Producción Pesquera  ·  UTN FRCh  ·  PesquerosEnIA  ·  2026</a:t>
+              <a:t>IA Aplicada a la Produccion Pesquera  |  UTN FRCh  |  PesquerosEnIA  |  2026</a:t>
             </a:r>
           </a:p>
         </p:txBody>
@@ -9081,8 +9442,51 @@
         </p:nvSpPr>
         <p:spPr>
           <a:xfrm>
+            <a:off x="8714232" y="0"/>
+            <a:ext cx="3474720" cy="6858000"/>
+          </a:xfrm>
+          <a:prstGeom prst="rect">
+            <a:avLst/>
+          </a:prstGeom>
+          <a:solidFill>
+            <a:srgbClr val="0E5568"/>
+          </a:solidFill>
+          <a:ln>
+            <a:noFill/>
+          </a:ln>
+        </p:spPr>
+        <p:style>
+          <a:lnRef idx="1">
+            <a:schemeClr val="accent1"/>
+          </a:lnRef>
+          <a:fillRef idx="3">
+            <a:schemeClr val="accent1"/>
+          </a:fillRef>
+          <a:effectRef idx="2">
+            <a:schemeClr val="accent1"/>
+          </a:effectRef>
+          <a:fontRef idx="minor">
+            <a:schemeClr val="lt1"/>
+          </a:fontRef>
+        </p:style>
+        <p:txBody>
+          <a:bodyPr rtlCol="0" anchor="ctr"/>
+          <a:lstStyle/>
+          <a:p>
+            <a:pPr algn="ctr"/>
+          </a:p>
+        </p:txBody>
+      </p:sp>
+      <p:sp>
+        <p:nvSpPr>
+          <p:cNvPr id="4" name="Rectangle 3"/>
+          <p:cNvSpPr/>
+          <p:nvPr/>
+        </p:nvSpPr>
+        <p:spPr>
+          <a:xfrm>
             <a:off x="0" y="0"/>
-            <a:ext cx="12188952" cy="109728"/>
+            <a:ext cx="12188952" cy="91440"/>
           </a:xfrm>
           <a:prstGeom prst="rect">
             <a:avLst/>
@@ -9118,14 +9522,14 @@
       </p:sp>
       <p:sp>
         <p:nvSpPr>
-          <p:cNvPr id="4" name="Rectangle 3"/>
+          <p:cNvPr id="5" name="Rectangle 4"/>
           <p:cNvSpPr/>
           <p:nvPr/>
         </p:nvSpPr>
         <p:spPr>
           <a:xfrm>
-            <a:off x="0" y="6748272"/>
-            <a:ext cx="12188952" cy="109728"/>
+            <a:off x="0" y="6766560"/>
+            <a:ext cx="12188952" cy="91440"/>
           </a:xfrm>
           <a:prstGeom prst="rect">
             <a:avLst/>
@@ -9161,7 +9565,7 @@
       </p:sp>
       <p:pic>
         <p:nvPicPr>
-          <p:cNvPr id="5" name="Picture 4" descr="logo_utn_frch_negro.png"/>
+          <p:cNvPr id="6" name="Picture 5" descr="logo_utn_frch_negro.png"/>
           <p:cNvPicPr>
             <a:picLocks noChangeAspect="1"/>
           </p:cNvPicPr>
@@ -9175,102 +9579,72 @@
         </p:blipFill>
         <p:spPr>
           <a:xfrm>
-            <a:off x="365760" y="228600"/>
-            <a:ext cx="1537714" cy="822960"/>
+            <a:off x="365760" y="155448"/>
+            <a:ext cx="1366857" cy="731520"/>
           </a:xfrm>
           <a:prstGeom prst="rect">
             <a:avLst/>
           </a:prstGeom>
         </p:spPr>
       </p:pic>
-      <p:sp>
-        <p:nvSpPr>
-          <p:cNvPr id="6" name="Rectangle 5"/>
+      <p:pic>
+        <p:nvPicPr>
+          <p:cNvPr id="7" name="Picture 6" descr="logo_pesqueros_full.png"/>
+          <p:cNvPicPr>
+            <a:picLocks noChangeAspect="1"/>
+          </p:cNvPicPr>
+          <p:nvPr/>
+        </p:nvPicPr>
+        <p:blipFill>
+          <a:blip r:embed="rId3"/>
+          <a:stretch>
+            <a:fillRect/>
+          </a:stretch>
+        </p:blipFill>
+        <p:spPr>
+          <a:xfrm>
+            <a:off x="2926080" y="201168"/>
+            <a:ext cx="1981200" cy="594360"/>
+          </a:xfrm>
+          <a:prstGeom prst="rect">
+            <a:avLst/>
+          </a:prstGeom>
+        </p:spPr>
+      </p:pic>
+      <p:pic>
+        <p:nvPicPr>
+          <p:cNvPr id="8" name="Picture 7" descr="logo_ariel_symbol.png"/>
+          <p:cNvPicPr>
+            <a:picLocks noChangeAspect="1"/>
+          </p:cNvPicPr>
+          <p:nvPr/>
+        </p:nvPicPr>
+        <p:blipFill>
+          <a:blip r:embed="rId4"/>
+          <a:stretch>
+            <a:fillRect/>
+          </a:stretch>
+        </p:blipFill>
+        <p:spPr>
+          <a:xfrm>
+            <a:off x="5120640" y="201168"/>
+            <a:ext cx="1981200" cy="594360"/>
+          </a:xfrm>
+          <a:prstGeom prst="rect">
+            <a:avLst/>
+          </a:prstGeom>
+        </p:spPr>
+      </p:pic>
+      <p:sp>
+        <p:nvSpPr>
+          <p:cNvPr id="9" name="Rectangle 8"/>
           <p:cNvSpPr/>
           <p:nvPr/>
         </p:nvSpPr>
         <p:spPr>
           <a:xfrm>
-            <a:off x="10177272" y="201168"/>
-            <a:ext cx="1828800" cy="822960"/>
-          </a:xfrm>
-          <a:prstGeom prst="rect">
-            <a:avLst/>
-          </a:prstGeom>
-          <a:solidFill>
-            <a:srgbClr val="059669"/>
-          </a:solidFill>
-          <a:ln>
-            <a:noFill/>
-          </a:ln>
-        </p:spPr>
-        <p:style>
-          <a:lnRef idx="1">
-            <a:schemeClr val="accent1"/>
-          </a:lnRef>
-          <a:fillRef idx="3">
-            <a:schemeClr val="accent1"/>
-          </a:fillRef>
-          <a:effectRef idx="2">
-            <a:schemeClr val="accent1"/>
-          </a:effectRef>
-          <a:fontRef idx="minor">
-            <a:schemeClr val="lt1"/>
-          </a:fontRef>
-        </p:style>
-        <p:txBody>
-          <a:bodyPr rtlCol="0" anchor="ctr"/>
-          <a:lstStyle/>
-          <a:p>
-            <a:pPr algn="ctr"/>
-          </a:p>
-        </p:txBody>
-      </p:sp>
-      <p:sp>
-        <p:nvSpPr>
-          <p:cNvPr id="7" name="TextBox 6"/>
-          <p:cNvSpPr txBox="1"/>
-          <p:nvPr/>
-        </p:nvSpPr>
-        <p:spPr>
-          <a:xfrm>
-            <a:off x="10177272" y="201168"/>
-            <a:ext cx="1828800" cy="822960"/>
-          </a:xfrm>
-          <a:prstGeom prst="rect">
-            <a:avLst/>
-          </a:prstGeom>
-          <a:noFill/>
-        </p:spPr>
-        <p:txBody>
-          <a:bodyPr wrap="none">
-            <a:spAutoFit/>
-          </a:bodyPr>
-          <a:lstStyle/>
-          <a:p>
-            <a:pPr algn="ctr"/>
-            <a:r>
-              <a:rPr sz="900" b="1">
-                <a:solidFill>
-                  <a:srgbClr val="FFFFFF"/>
-                </a:solidFill>
-                <a:latin typeface="Calibri"/>
-              </a:rPr>
-              <a:t>PesquerosEnIA</a:t>
-            </a:r>
-          </a:p>
-        </p:txBody>
-      </p:sp>
-      <p:sp>
-        <p:nvSpPr>
-          <p:cNvPr id="8" name="Rectangle 7"/>
-          <p:cNvSpPr/>
-          <p:nvPr/>
-        </p:nvSpPr>
-        <p:spPr>
-          <a:xfrm>
-            <a:off x="365760" y="1280160"/>
-            <a:ext cx="11457432" cy="36576"/>
+            <a:off x="365760" y="1078992"/>
+            <a:ext cx="8348472" cy="32004"/>
           </a:xfrm>
           <a:prstGeom prst="rect">
             <a:avLst/>
@@ -9306,14 +9680,14 @@
       </p:sp>
       <p:sp>
         <p:nvSpPr>
-          <p:cNvPr id="9" name="TextBox 8"/>
+          <p:cNvPr id="10" name="TextBox 9"/>
           <p:cNvSpPr txBox="1"/>
           <p:nvPr/>
         </p:nvSpPr>
         <p:spPr>
           <a:xfrm>
-            <a:off x="365760" y="1463040"/>
-            <a:ext cx="11457432" cy="1645920"/>
+            <a:off x="365760" y="1280160"/>
+            <a:ext cx="8074152" cy="1645920"/>
           </a:xfrm>
           <a:prstGeom prst="rect">
             <a:avLst/>
@@ -9326,9 +9700,9 @@
           </a:bodyPr>
           <a:lstStyle/>
           <a:p>
-            <a:pPr algn="ctr"/>
-            <a:r>
-              <a:rPr sz="3400" b="1" i="0">
+            <a:pPr algn="l"/>
+            <a:r>
+              <a:rPr sz="3200" b="1" i="0">
                 <a:solidFill>
                   <a:srgbClr val="FFFFFF"/>
                 </a:solidFill>
@@ -9341,14 +9715,14 @@
       </p:sp>
       <p:sp>
         <p:nvSpPr>
-          <p:cNvPr id="10" name="TextBox 9"/>
+          <p:cNvPr id="11" name="TextBox 10"/>
           <p:cNvSpPr txBox="1"/>
           <p:nvPr/>
         </p:nvSpPr>
         <p:spPr>
           <a:xfrm>
-            <a:off x="365760" y="3017520"/>
-            <a:ext cx="11457432" cy="731520"/>
+            <a:off x="365760" y="2880360"/>
+            <a:ext cx="8074152" cy="685800"/>
           </a:xfrm>
           <a:prstGeom prst="rect">
             <a:avLst/>
@@ -9361,9 +9735,9 @@
           </a:bodyPr>
           <a:lstStyle/>
           <a:p>
-            <a:pPr algn="ctr"/>
-            <a:r>
-              <a:rPr sz="1900" b="0" i="0">
+            <a:pPr algn="l"/>
+            <a:r>
+              <a:rPr sz="1600" b="0" i="0">
                 <a:solidFill>
                   <a:srgbClr val="0099CC"/>
                 </a:solidFill>
@@ -9376,14 +9750,14 @@
       </p:sp>
       <p:sp>
         <p:nvSpPr>
-          <p:cNvPr id="11" name="Rectangle 10"/>
+          <p:cNvPr id="12" name="Rectangle 11"/>
           <p:cNvSpPr/>
           <p:nvPr/>
         </p:nvSpPr>
         <p:spPr>
           <a:xfrm>
-            <a:off x="1828800" y="3931920"/>
-            <a:ext cx="8531352" cy="36576"/>
+            <a:off x="365760" y="3703320"/>
+            <a:ext cx="5029200" cy="32004"/>
           </a:xfrm>
           <a:prstGeom prst="rect">
             <a:avLst/>
@@ -9419,14 +9793,14 @@
       </p:sp>
       <p:sp>
         <p:nvSpPr>
-          <p:cNvPr id="12" name="TextBox 11"/>
+          <p:cNvPr id="13" name="TextBox 12"/>
           <p:cNvSpPr txBox="1"/>
           <p:nvPr/>
         </p:nvSpPr>
         <p:spPr>
           <a:xfrm>
-            <a:off x="365760" y="4114800"/>
-            <a:ext cx="11457432" cy="548640"/>
+            <a:off x="365760" y="3794760"/>
+            <a:ext cx="7772400" cy="502920"/>
           </a:xfrm>
           <a:prstGeom prst="rect">
             <a:avLst/>
@@ -9439,29 +9813,72 @@
           </a:bodyPr>
           <a:lstStyle/>
           <a:p>
+            <a:pPr algn="l"/>
+            <a:r>
+              <a:rPr sz="1400" b="0" i="0">
+                <a:solidFill>
+                  <a:srgbClr val="BEE1FF"/>
+                </a:solidFill>
+                <a:latin typeface="Consolas"/>
+              </a:rPr>
+              <a:t>github.com/PesquerosEnIA/curso-ia-produccion-pesquera</a:t>
+            </a:r>
+          </a:p>
+        </p:txBody>
+      </p:sp>
+      <p:sp>
+        <p:nvSpPr>
+          <p:cNvPr id="14" name="Rectangle 13"/>
+          <p:cNvSpPr/>
+          <p:nvPr/>
+        </p:nvSpPr>
+        <p:spPr>
+          <a:xfrm>
+            <a:off x="365760" y="4434840"/>
+            <a:ext cx="7772400" cy="822960"/>
+          </a:xfrm>
+          <a:prstGeom prst="rect">
+            <a:avLst/>
+          </a:prstGeom>
+          <a:solidFill>
+            <a:srgbClr val="187DAE"/>
+          </a:solidFill>
+          <a:ln>
+            <a:noFill/>
+          </a:ln>
+        </p:spPr>
+        <p:style>
+          <a:lnRef idx="1">
+            <a:schemeClr val="accent1"/>
+          </a:lnRef>
+          <a:fillRef idx="3">
+            <a:schemeClr val="accent1"/>
+          </a:fillRef>
+          <a:effectRef idx="2">
+            <a:schemeClr val="accent1"/>
+          </a:effectRef>
+          <a:fontRef idx="minor">
+            <a:schemeClr val="lt1"/>
+          </a:fontRef>
+        </p:style>
+        <p:txBody>
+          <a:bodyPr rtlCol="0" anchor="ctr"/>
+          <a:lstStyle/>
+          <a:p>
             <a:pPr algn="ctr"/>
-            <a:r>
-              <a:rPr sz="1600" b="0" i="0">
-                <a:solidFill>
-                  <a:srgbClr val="0099CC"/>
-                </a:solidFill>
-                <a:latin typeface="Consolas"/>
-              </a:rPr>
-              <a:t>github.com/PesquerosEnIA/curso-ia-produccion-pesquera</a:t>
-            </a:r>
-          </a:p>
-        </p:txBody>
-      </p:sp>
-      <p:sp>
-        <p:nvSpPr>
-          <p:cNvPr id="13" name="TextBox 12"/>
+          </a:p>
+        </p:txBody>
+      </p:sp>
+      <p:sp>
+        <p:nvSpPr>
+          <p:cNvPr id="15" name="TextBox 14"/>
           <p:cNvSpPr txBox="1"/>
           <p:nvPr/>
         </p:nvSpPr>
         <p:spPr>
           <a:xfrm>
-            <a:off x="365760" y="4846320"/>
-            <a:ext cx="11457432" cy="731520"/>
+            <a:off x="502920" y="4480560"/>
+            <a:ext cx="7498079" cy="731520"/>
           </a:xfrm>
           <a:prstGeom prst="rect">
             <a:avLst/>
@@ -9474,11 +9891,11 @@
           </a:bodyPr>
           <a:lstStyle/>
           <a:p>
-            <a:pPr algn="ctr"/>
-            <a:r>
-              <a:rPr sz="1500" b="0" i="0">
-                <a:solidFill>
-                  <a:srgbClr val="C8E6FF"/>
+            <a:pPr algn="l"/>
+            <a:r>
+              <a:rPr sz="1300" b="0" i="0">
+                <a:solidFill>
+                  <a:srgbClr val="FFFFFF"/>
                 </a:solidFill>
                 <a:latin typeface="Calibri"/>
               </a:rPr>
@@ -9489,14 +9906,14 @@
       </p:sp>
       <p:sp>
         <p:nvSpPr>
-          <p:cNvPr id="14" name="TextBox 13"/>
+          <p:cNvPr id="16" name="TextBox 15"/>
           <p:cNvSpPr txBox="1"/>
           <p:nvPr/>
         </p:nvSpPr>
         <p:spPr>
           <a:xfrm>
-            <a:off x="365760" y="6080760"/>
-            <a:ext cx="11457432" cy="457200"/>
+            <a:off x="8988552" y="2011680"/>
+            <a:ext cx="2926080" cy="1280160"/>
           </a:xfrm>
           <a:prstGeom prst="rect">
             <a:avLst/>
@@ -9511,13 +9928,49 @@
           <a:p>
             <a:pPr algn="ctr"/>
             <a:r>
-              <a:rPr sz="1300" b="0" i="0">
-                <a:solidFill>
-                  <a:srgbClr val="0099CC"/>
-                </a:solidFill>
-                <a:latin typeface="Calibri"/>
-              </a:rPr>
-              <a:t>UTN FRCh · PesquerosEnIA · 2026</a:t>
+              <a:rPr sz="1600" b="0" i="0">
+                <a:solidFill>
+                  <a:srgbClr val="B4D7FF"/>
+                </a:solidFill>
+                <a:latin typeface="Consolas"/>
+              </a:rPr>
+              <a:t>github.com/
+PesquerosEnIA</a:t>
+            </a:r>
+          </a:p>
+        </p:txBody>
+      </p:sp>
+      <p:sp>
+        <p:nvSpPr>
+          <p:cNvPr id="17" name="TextBox 16"/>
+          <p:cNvSpPr txBox="1"/>
+          <p:nvPr/>
+        </p:nvSpPr>
+        <p:spPr>
+          <a:xfrm>
+            <a:off x="365760" y="6382512"/>
+            <a:ext cx="8074152" cy="384048"/>
+          </a:xfrm>
+          <a:prstGeom prst="rect">
+            <a:avLst/>
+          </a:prstGeom>
+          <a:noFill/>
+        </p:spPr>
+        <p:txBody>
+          <a:bodyPr wrap="square">
+            <a:spAutoFit/>
+          </a:bodyPr>
+          <a:lstStyle/>
+          <a:p>
+            <a:pPr algn="l"/>
+            <a:r>
+              <a:rPr sz="1100" b="0" i="0">
+                <a:solidFill>
+                  <a:srgbClr val="A0C8F0"/>
+                </a:solidFill>
+                <a:latin typeface="Calibri"/>
+              </a:rPr>
+              <a:t>UTN FRCh  |  PesquerosEnIA  |  2026</a:t>
             </a:r>
           </a:p>
         </p:txBody>
@@ -10538,8 +10991,8 @@
         </p:nvSpPr>
         <p:spPr>
           <a:xfrm>
-            <a:off x="0" y="6446520"/>
-            <a:ext cx="12188952" cy="411480"/>
+            <a:off x="0" y="6419088"/>
+            <a:ext cx="12188952" cy="438912"/>
           </a:xfrm>
           <a:prstGeom prst="rect">
             <a:avLst/>
@@ -10573,16 +11026,40 @@
           </a:p>
         </p:txBody>
       </p:sp>
-      <p:sp>
-        <p:nvSpPr>
-          <p:cNvPr id="29" name="TextBox 28"/>
+      <p:pic>
+        <p:nvPicPr>
+          <p:cNvPr id="29" name="Picture 28" descr="logo_pesqueros_symbol.png"/>
+          <p:cNvPicPr>
+            <a:picLocks noChangeAspect="1"/>
+          </p:cNvPicPr>
+          <p:nvPr/>
+        </p:nvPicPr>
+        <p:blipFill>
+          <a:blip r:embed="rId2"/>
+          <a:stretch>
+            <a:fillRect/>
+          </a:stretch>
+        </p:blipFill>
+        <p:spPr>
+          <a:xfrm>
+            <a:off x="137160" y="6455664"/>
+            <a:ext cx="347472" cy="347472"/>
+          </a:xfrm>
+          <a:prstGeom prst="rect">
+            <a:avLst/>
+          </a:prstGeom>
+        </p:spPr>
+      </p:pic>
+      <p:sp>
+        <p:nvSpPr>
+          <p:cNvPr id="30" name="TextBox 29"/>
           <p:cNvSpPr txBox="1"/>
           <p:nvPr/>
         </p:nvSpPr>
         <p:spPr>
           <a:xfrm>
-            <a:off x="274320" y="6473952"/>
-            <a:ext cx="11640312" cy="347472"/>
+            <a:off x="594360" y="6455664"/>
+            <a:ext cx="11457432" cy="347472"/>
           </a:xfrm>
           <a:prstGeom prst="rect">
             <a:avLst/>
@@ -10603,7 +11080,7 @@
                 </a:solidFill>
                 <a:latin typeface="Calibri"/>
               </a:rPr>
-              <a:t>Inteligencia Artificial Aplicada a la Producción Pesquera  ·  UTN FRCh  ·  PesquerosEnIA  ·  2026</a:t>
+              <a:t>IA Aplicada a la Produccion Pesquera  |  UTN FRCh  |  PesquerosEnIA  |  2026</a:t>
             </a:r>
           </a:p>
         </p:txBody>
@@ -12060,8 +12537,8 @@
         </p:nvSpPr>
         <p:spPr>
           <a:xfrm>
-            <a:off x="0" y="6446520"/>
-            <a:ext cx="12188952" cy="411480"/>
+            <a:off x="0" y="6419088"/>
+            <a:ext cx="12188952" cy="438912"/>
           </a:xfrm>
           <a:prstGeom prst="rect">
             <a:avLst/>
@@ -12095,16 +12572,40 @@
           </a:p>
         </p:txBody>
       </p:sp>
-      <p:sp>
-        <p:nvSpPr>
-          <p:cNvPr id="41" name="TextBox 40"/>
+      <p:pic>
+        <p:nvPicPr>
+          <p:cNvPr id="41" name="Picture 40" descr="logo_pesqueros_symbol.png"/>
+          <p:cNvPicPr>
+            <a:picLocks noChangeAspect="1"/>
+          </p:cNvPicPr>
+          <p:nvPr/>
+        </p:nvPicPr>
+        <p:blipFill>
+          <a:blip r:embed="rId2"/>
+          <a:stretch>
+            <a:fillRect/>
+          </a:stretch>
+        </p:blipFill>
+        <p:spPr>
+          <a:xfrm>
+            <a:off x="137160" y="6455664"/>
+            <a:ext cx="347472" cy="347472"/>
+          </a:xfrm>
+          <a:prstGeom prst="rect">
+            <a:avLst/>
+          </a:prstGeom>
+        </p:spPr>
+      </p:pic>
+      <p:sp>
+        <p:nvSpPr>
+          <p:cNvPr id="42" name="TextBox 41"/>
           <p:cNvSpPr txBox="1"/>
           <p:nvPr/>
         </p:nvSpPr>
         <p:spPr>
           <a:xfrm>
-            <a:off x="274320" y="6473952"/>
-            <a:ext cx="11640312" cy="347472"/>
+            <a:off x="594360" y="6455664"/>
+            <a:ext cx="11457432" cy="347472"/>
           </a:xfrm>
           <a:prstGeom prst="rect">
             <a:avLst/>
@@ -12125,7 +12626,7 @@
                 </a:solidFill>
                 <a:latin typeface="Calibri"/>
               </a:rPr>
-              <a:t>Inteligencia Artificial Aplicada a la Producción Pesquera  ·  UTN FRCh  ·  PesquerosEnIA  ·  2026</a:t>
+              <a:t>IA Aplicada a la Produccion Pesquera  |  UTN FRCh  |  PesquerosEnIA  |  2026</a:t>
             </a:r>
           </a:p>
         </p:txBody>
@@ -12530,8 +13031,8 @@
         </p:nvSpPr>
         <p:spPr>
           <a:xfrm>
-            <a:off x="0" y="6446520"/>
-            <a:ext cx="12188952" cy="411480"/>
+            <a:off x="0" y="6419088"/>
+            <a:ext cx="12188952" cy="438912"/>
           </a:xfrm>
           <a:prstGeom prst="rect">
             <a:avLst/>
@@ -12565,16 +13066,40 @@
           </a:p>
         </p:txBody>
       </p:sp>
-      <p:sp>
-        <p:nvSpPr>
-          <p:cNvPr id="9" name="TextBox 8"/>
+      <p:pic>
+        <p:nvPicPr>
+          <p:cNvPr id="9" name="Picture 8" descr="logo_pesqueros_symbol.png"/>
+          <p:cNvPicPr>
+            <a:picLocks noChangeAspect="1"/>
+          </p:cNvPicPr>
+          <p:nvPr/>
+        </p:nvPicPr>
+        <p:blipFill>
+          <a:blip r:embed="rId2"/>
+          <a:stretch>
+            <a:fillRect/>
+          </a:stretch>
+        </p:blipFill>
+        <p:spPr>
+          <a:xfrm>
+            <a:off x="137160" y="6455664"/>
+            <a:ext cx="347472" cy="347472"/>
+          </a:xfrm>
+          <a:prstGeom prst="rect">
+            <a:avLst/>
+          </a:prstGeom>
+        </p:spPr>
+      </p:pic>
+      <p:sp>
+        <p:nvSpPr>
+          <p:cNvPr id="10" name="TextBox 9"/>
           <p:cNvSpPr txBox="1"/>
           <p:nvPr/>
         </p:nvSpPr>
         <p:spPr>
           <a:xfrm>
-            <a:off x="274320" y="6473952"/>
-            <a:ext cx="11640312" cy="347472"/>
+            <a:off x="594360" y="6455664"/>
+            <a:ext cx="11457432" cy="347472"/>
           </a:xfrm>
           <a:prstGeom prst="rect">
             <a:avLst/>
@@ -12595,7 +13120,7 @@
                 </a:solidFill>
                 <a:latin typeface="Calibri"/>
               </a:rPr>
-              <a:t>Inteligencia Artificial Aplicada a la Producción Pesquera  ·  UTN FRCh  ·  PesquerosEnIA  ·  2026</a:t>
+              <a:t>IA Aplicada a la Produccion Pesquera  |  UTN FRCh  |  PesquerosEnIA  |  2026</a:t>
             </a:r>
           </a:p>
         </p:txBody>
@@ -13019,8 +13544,8 @@
         </p:nvSpPr>
         <p:spPr>
           <a:xfrm>
-            <a:off x="0" y="6446520"/>
-            <a:ext cx="12188952" cy="411480"/>
+            <a:off x="0" y="6419088"/>
+            <a:ext cx="12188952" cy="438912"/>
           </a:xfrm>
           <a:prstGeom prst="rect">
             <a:avLst/>
@@ -13054,16 +13579,40 @@
           </a:p>
         </p:txBody>
       </p:sp>
-      <p:sp>
-        <p:nvSpPr>
-          <p:cNvPr id="9" name="TextBox 8"/>
+      <p:pic>
+        <p:nvPicPr>
+          <p:cNvPr id="9" name="Picture 8" descr="logo_pesqueros_symbol.png"/>
+          <p:cNvPicPr>
+            <a:picLocks noChangeAspect="1"/>
+          </p:cNvPicPr>
+          <p:nvPr/>
+        </p:nvPicPr>
+        <p:blipFill>
+          <a:blip r:embed="rId2"/>
+          <a:stretch>
+            <a:fillRect/>
+          </a:stretch>
+        </p:blipFill>
+        <p:spPr>
+          <a:xfrm>
+            <a:off x="137160" y="6455664"/>
+            <a:ext cx="347472" cy="347472"/>
+          </a:xfrm>
+          <a:prstGeom prst="rect">
+            <a:avLst/>
+          </a:prstGeom>
+        </p:spPr>
+      </p:pic>
+      <p:sp>
+        <p:nvSpPr>
+          <p:cNvPr id="10" name="TextBox 9"/>
           <p:cNvSpPr txBox="1"/>
           <p:nvPr/>
         </p:nvSpPr>
         <p:spPr>
           <a:xfrm>
-            <a:off x="274320" y="6473952"/>
-            <a:ext cx="11640312" cy="347472"/>
+            <a:off x="594360" y="6455664"/>
+            <a:ext cx="11457432" cy="347472"/>
           </a:xfrm>
           <a:prstGeom prst="rect">
             <a:avLst/>
@@ -13084,7 +13633,7 @@
                 </a:solidFill>
                 <a:latin typeface="Calibri"/>
               </a:rPr>
-              <a:t>Inteligencia Artificial Aplicada a la Producción Pesquera  ·  UTN FRCh  ·  PesquerosEnIA  ·  2026</a:t>
+              <a:t>IA Aplicada a la Produccion Pesquera  |  UTN FRCh  |  PesquerosEnIA  |  2026</a:t>
             </a:r>
           </a:p>
         </p:txBody>
@@ -13470,8 +14019,8 @@
         </p:nvSpPr>
         <p:spPr>
           <a:xfrm>
-            <a:off x="0" y="6446520"/>
-            <a:ext cx="12188952" cy="411480"/>
+            <a:off x="0" y="6419088"/>
+            <a:ext cx="12188952" cy="438912"/>
           </a:xfrm>
           <a:prstGeom prst="rect">
             <a:avLst/>
@@ -13505,16 +14054,40 @@
           </a:p>
         </p:txBody>
       </p:sp>
-      <p:sp>
-        <p:nvSpPr>
-          <p:cNvPr id="9" name="TextBox 8"/>
+      <p:pic>
+        <p:nvPicPr>
+          <p:cNvPr id="9" name="Picture 8" descr="logo_pesqueros_symbol.png"/>
+          <p:cNvPicPr>
+            <a:picLocks noChangeAspect="1"/>
+          </p:cNvPicPr>
+          <p:nvPr/>
+        </p:nvPicPr>
+        <p:blipFill>
+          <a:blip r:embed="rId2"/>
+          <a:stretch>
+            <a:fillRect/>
+          </a:stretch>
+        </p:blipFill>
+        <p:spPr>
+          <a:xfrm>
+            <a:off x="137160" y="6455664"/>
+            <a:ext cx="347472" cy="347472"/>
+          </a:xfrm>
+          <a:prstGeom prst="rect">
+            <a:avLst/>
+          </a:prstGeom>
+        </p:spPr>
+      </p:pic>
+      <p:sp>
+        <p:nvSpPr>
+          <p:cNvPr id="10" name="TextBox 9"/>
           <p:cNvSpPr txBox="1"/>
           <p:nvPr/>
         </p:nvSpPr>
         <p:spPr>
           <a:xfrm>
-            <a:off x="274320" y="6473952"/>
-            <a:ext cx="11640312" cy="347472"/>
+            <a:off x="594360" y="6455664"/>
+            <a:ext cx="11457432" cy="347472"/>
           </a:xfrm>
           <a:prstGeom prst="rect">
             <a:avLst/>
@@ -13535,7 +14108,7 @@
                 </a:solidFill>
                 <a:latin typeface="Calibri"/>
               </a:rPr>
-              <a:t>Inteligencia Artificial Aplicada a la Producción Pesquera  ·  UTN FRCh  ·  PesquerosEnIA  ·  2026</a:t>
+              <a:t>IA Aplicada a la Produccion Pesquera  |  UTN FRCh  |  PesquerosEnIA  |  2026</a:t>
             </a:r>
           </a:p>
         </p:txBody>
@@ -13940,8 +14513,8 @@
         </p:nvSpPr>
         <p:spPr>
           <a:xfrm>
-            <a:off x="0" y="6446520"/>
-            <a:ext cx="12188952" cy="411480"/>
+            <a:off x="0" y="6419088"/>
+            <a:ext cx="12188952" cy="438912"/>
           </a:xfrm>
           <a:prstGeom prst="rect">
             <a:avLst/>
@@ -13975,16 +14548,40 @@
           </a:p>
         </p:txBody>
       </p:sp>
-      <p:sp>
-        <p:nvSpPr>
-          <p:cNvPr id="9" name="TextBox 8"/>
+      <p:pic>
+        <p:nvPicPr>
+          <p:cNvPr id="9" name="Picture 8" descr="logo_pesqueros_symbol.png"/>
+          <p:cNvPicPr>
+            <a:picLocks noChangeAspect="1"/>
+          </p:cNvPicPr>
+          <p:nvPr/>
+        </p:nvPicPr>
+        <p:blipFill>
+          <a:blip r:embed="rId2"/>
+          <a:stretch>
+            <a:fillRect/>
+          </a:stretch>
+        </p:blipFill>
+        <p:spPr>
+          <a:xfrm>
+            <a:off x="137160" y="6455664"/>
+            <a:ext cx="347472" cy="347472"/>
+          </a:xfrm>
+          <a:prstGeom prst="rect">
+            <a:avLst/>
+          </a:prstGeom>
+        </p:spPr>
+      </p:pic>
+      <p:sp>
+        <p:nvSpPr>
+          <p:cNvPr id="10" name="TextBox 9"/>
           <p:cNvSpPr txBox="1"/>
           <p:nvPr/>
         </p:nvSpPr>
         <p:spPr>
           <a:xfrm>
-            <a:off x="274320" y="6473952"/>
-            <a:ext cx="11640312" cy="347472"/>
+            <a:off x="594360" y="6455664"/>
+            <a:ext cx="11457432" cy="347472"/>
           </a:xfrm>
           <a:prstGeom prst="rect">
             <a:avLst/>
@@ -14005,7 +14602,7 @@
                 </a:solidFill>
                 <a:latin typeface="Calibri"/>
               </a:rPr>
-              <a:t>Inteligencia Artificial Aplicada a la Producción Pesquera  ·  UTN FRCh  ·  PesquerosEnIA  ·  2026</a:t>
+              <a:t>IA Aplicada a la Produccion Pesquera  |  UTN FRCh  |  PesquerosEnIA  |  2026</a:t>
             </a:r>
           </a:p>
         </p:txBody>
@@ -14448,8 +15045,8 @@
         </p:nvSpPr>
         <p:spPr>
           <a:xfrm>
-            <a:off x="0" y="6446520"/>
-            <a:ext cx="12188952" cy="411480"/>
+            <a:off x="0" y="6419088"/>
+            <a:ext cx="12188952" cy="438912"/>
           </a:xfrm>
           <a:prstGeom prst="rect">
             <a:avLst/>
@@ -14483,16 +15080,40 @@
           </a:p>
         </p:txBody>
       </p:sp>
-      <p:sp>
-        <p:nvSpPr>
-          <p:cNvPr id="9" name="TextBox 8"/>
+      <p:pic>
+        <p:nvPicPr>
+          <p:cNvPr id="9" name="Picture 8" descr="logo_pesqueros_symbol.png"/>
+          <p:cNvPicPr>
+            <a:picLocks noChangeAspect="1"/>
+          </p:cNvPicPr>
+          <p:nvPr/>
+        </p:nvPicPr>
+        <p:blipFill>
+          <a:blip r:embed="rId2"/>
+          <a:stretch>
+            <a:fillRect/>
+          </a:stretch>
+        </p:blipFill>
+        <p:spPr>
+          <a:xfrm>
+            <a:off x="137160" y="6455664"/>
+            <a:ext cx="347472" cy="347472"/>
+          </a:xfrm>
+          <a:prstGeom prst="rect">
+            <a:avLst/>
+          </a:prstGeom>
+        </p:spPr>
+      </p:pic>
+      <p:sp>
+        <p:nvSpPr>
+          <p:cNvPr id="10" name="TextBox 9"/>
           <p:cNvSpPr txBox="1"/>
           <p:nvPr/>
         </p:nvSpPr>
         <p:spPr>
           <a:xfrm>
-            <a:off x="274320" y="6473952"/>
-            <a:ext cx="11640312" cy="347472"/>
+            <a:off x="594360" y="6455664"/>
+            <a:ext cx="11457432" cy="347472"/>
           </a:xfrm>
           <a:prstGeom prst="rect">
             <a:avLst/>
@@ -14513,7 +15134,7 @@
                 </a:solidFill>
                 <a:latin typeface="Calibri"/>
               </a:rPr>
-              <a:t>Inteligencia Artificial Aplicada a la Producción Pesquera  ·  UTN FRCh  ·  PesquerosEnIA  ·  2026</a:t>
+              <a:t>IA Aplicada a la Produccion Pesquera  |  UTN FRCh  |  PesquerosEnIA  |  2026</a:t>
             </a:r>
           </a:p>
         </p:txBody>
@@ -15674,8 +16295,8 @@
         </p:nvSpPr>
         <p:spPr>
           <a:xfrm>
-            <a:off x="0" y="6446520"/>
-            <a:ext cx="12188952" cy="411480"/>
+            <a:off x="0" y="6419088"/>
+            <a:ext cx="12188952" cy="438912"/>
           </a:xfrm>
           <a:prstGeom prst="rect">
             <a:avLst/>
@@ -15709,16 +16330,40 @@
           </a:p>
         </p:txBody>
       </p:sp>
-      <p:sp>
-        <p:nvSpPr>
-          <p:cNvPr id="33" name="TextBox 32"/>
+      <p:pic>
+        <p:nvPicPr>
+          <p:cNvPr id="33" name="Picture 32" descr="logo_pesqueros_symbol.png"/>
+          <p:cNvPicPr>
+            <a:picLocks noChangeAspect="1"/>
+          </p:cNvPicPr>
+          <p:nvPr/>
+        </p:nvPicPr>
+        <p:blipFill>
+          <a:blip r:embed="rId2"/>
+          <a:stretch>
+            <a:fillRect/>
+          </a:stretch>
+        </p:blipFill>
+        <p:spPr>
+          <a:xfrm>
+            <a:off x="137160" y="6455664"/>
+            <a:ext cx="347472" cy="347472"/>
+          </a:xfrm>
+          <a:prstGeom prst="rect">
+            <a:avLst/>
+          </a:prstGeom>
+        </p:spPr>
+      </p:pic>
+      <p:sp>
+        <p:nvSpPr>
+          <p:cNvPr id="34" name="TextBox 33"/>
           <p:cNvSpPr txBox="1"/>
           <p:nvPr/>
         </p:nvSpPr>
         <p:spPr>
           <a:xfrm>
-            <a:off x="274320" y="6473952"/>
-            <a:ext cx="11640312" cy="347472"/>
+            <a:off x="594360" y="6455664"/>
+            <a:ext cx="11457432" cy="347472"/>
           </a:xfrm>
           <a:prstGeom prst="rect">
             <a:avLst/>
@@ -15739,7 +16384,7 @@
                 </a:solidFill>
                 <a:latin typeface="Calibri"/>
               </a:rPr>
-              <a:t>Inteligencia Artificial Aplicada a la Producción Pesquera  ·  UTN FRCh  ·  PesquerosEnIA  ·  2026</a:t>
+              <a:t>IA Aplicada a la Produccion Pesquera  |  UTN FRCh  |  PesquerosEnIA  |  2026</a:t>
             </a:r>
           </a:p>
         </p:txBody>
